--- a/demo_session/deck_dwdsurf_options.pptx
+++ b/demo_session/deck_dwdsurf_options.pptx
@@ -3126,7 +3126,7 @@
                 </a:solidFill>
                 <a:latin typeface="Arial"/>
               </a:rPr>
-              <a:t>dw/dsurf on a segmented pupil: what each option does to one segment's column</a:t>
+              <a:t>dw/dsurf on the JWST OTE deck: what each option does to one segment's column</a:t>
             </a:r>
           </a:p>
           <a:p>
@@ -3142,7 +3142,7 @@
                 </a:solidFill>
                 <a:latin typeface="Arial"/>
               </a:rPr>
-              <a:t>e5hex1, 7 hex segments, model 128, 63-ray grid; segment 2 (element 3) poked alone in radius (Kr) and conic (Kc)</a:t>
+              <a:t>jwst_ote_designc.in (Luis's zoom deck), model 512, 63-ray grid, stop at the FSM (element 25), wavefront read at the ExitPupil Return (27); Seg2 (element 5) poked alone in radius (Kr) and conic (Kc) through run_sensitivities, centre field</a:t>
             </a:r>
           </a:p>
         </p:txBody>
@@ -3181,7 +3181,7 @@
                 </a:solidFill>
                 <a:latin typeface="Arial"/>
               </a:rPr>
-              <a:t>DRAFT 2026-09-09.  Driver macos.dw_dsurf; every option is also a run_sensitivities option since this date.</a:t>
+              <a:t>DRAFT 2026-09-09.  Every option shown is a run_sensitivities option since this date ('orient', 'sign', 'opd_ref', and 'elts' now reach the dwdsurf channel).  Numbers: dW/dp per unit parameter, mm of OPD per mm (Kr) / per unit (Kc), centre field, single configuration.</a:t>
             </a:r>
           </a:p>
         </p:txBody>
@@ -3254,7 +3254,7 @@
                 </a:solidFill>
                 <a:latin typeface="Arial"/>
               </a:rPr>
-              <a:t>mean reference: one constant on the other six; chief reference: exactly zero</a:t>
+              <a:t>mean reference: one constant on the other 17; chief reference: exactly zero</a:t>
             </a:r>
           </a:p>
         </p:txBody>
@@ -3305,7 +3305,7 @@
       </p:sp>
       <p:pic>
         <p:nvPicPr>
-          <p:cNvPr id="4" name="Picture 3" descr="dwdsurf_ref.png"/>
+          <p:cNvPr id="4" name="Picture 3" descr="dwdsurf_jwst_ref.png"/>
           <p:cNvPicPr>
             <a:picLocks noChangeAspect="1"/>
           </p:cNvPicPr>
@@ -3319,8 +3319,8 @@
         </p:blipFill>
         <p:spPr>
           <a:xfrm>
-            <a:off x="2634483" y="1298448"/>
-            <a:ext cx="6922727" cy="4177792"/>
+            <a:off x="2720448" y="1298448"/>
+            <a:ext cx="6750798" cy="4177792"/>
           </a:xfrm>
           <a:prstGeom prst="rect">
             <a:avLst/>
@@ -3361,7 +3361,7 @@
                 </a:solidFill>
                 <a:latin typeface="Arial"/>
               </a:rPr>
-              <a:t>Kr and Kc columns of segment 2 under opd_ref = mean (left) and chief (right): the six unpoked segments carry a flat offset on the left and exactly nothing on the right; the colour scale is +-3x that offset, so the poked segment saturates.</a:t>
+              <a:t>Kr and Kc columns of Seg2 under opd_ref = mean (left) and chief (right): the 17 unpoked segments carry a flat offset on the left and exactly nothing on the right; the colour scale is +-3x that offset, so the poked segment saturates.</a:t>
             </a:r>
           </a:p>
         </p:txBody>
@@ -3400,7 +3400,7 @@
                 </a:solidFill>
                 <a:latin typeface="Arial"/>
               </a:rPr>
-              <a:t>Offset on the unpoked segments under mean = -(N_k/N) x mean(poked response): Kr 4.32e-4, Kc 2.04e-2 per unit parameter (13% / 11% of the poked segment's rms), equal on all six to 3e-16.  OPD in mm per mm of Kr / per unit Kc; orient xy, sign opl, remove_ptt off.</a:t>
+              <a:t>Offset on the unpoked segments under mean = -(N_k/N) x mean(poked response): Kr 4.40e-4, Kc 1.66e-2 per unit parameter (5.4% / 4.5% of the poked segment's rms), equal on all 17 to 6e-16; the mean and chief columns differ by that one constant everywhere (1.4e-12 relative).  orient xy, sign opl, surf_remove_ptt off.</a:t>
             </a:r>
           </a:p>
         </p:txBody>
@@ -3836,7 +3836,7 @@
                 </a:solidFill>
                 <a:latin typeface="Arial"/>
               </a:rPr>
-              <a:t>the reference is one ray on the centre segment; any other segment's poke leaves it alone -&gt; other segments read 0</a:t>
+              <a:t>the reference is one ray; on this deck it passes through the virtual centre segment (element 4), so every REAL segment's poke leaves it alone and the other segments read 0</a:t>
             </a:r>
           </a:p>
         </p:txBody>
@@ -3957,7 +3957,7 @@
                 </a:solidFill>
                 <a:latin typeface="Arial"/>
               </a:rPr>
-              <a:t>poking the centre segment moves the chief's path too; the others then read -m(chief), 5% of that segment's rms for Kr.  A fixed nominal reference length (engine OPDRefRayLen branch, one api wrapper) localises every column</a:t>
+              <a:t>a deck whose chief ray sits on a real segment (e5hex1: the centre one) moves the reference when that segment is poked; the others then read -m(chief), 5% of that segment's rms for Kr.  A fixed nominal reference length (engine OPDRefRayLen branch, one api wrapper) localises every column</a:t>
             </a:r>
           </a:p>
         </p:txBody>
@@ -3996,7 +3996,7 @@
                 </a:solidFill>
                 <a:latin typeface="Arial"/>
               </a:rPr>
-              <a:t>Gate: tOpdRef/test_driver_single_segment_poke_is_local_under_chief (fails on the previous code).  Default stays 'mean' until the fixed-length reference lands: no committed baseline moves.</a:t>
+              <a:t>Gates: tOpdRef/test_driver_single_segment_poke_is_local_under_chief (e5hex1, driver path; fails on the previous code) and tRunSensitivities/test_dwdsurf_channel_honours_elts_orient_and_opd_ref.  The default stays 'mean' until the fixed-length reference lands: no committed baseline moves.</a:t>
             </a:r>
           </a:p>
         </p:txBody>
@@ -4120,7 +4120,7 @@
       </p:sp>
       <p:pic>
         <p:nvPicPr>
-          <p:cNvPr id="4" name="Picture 3" descr="dwdsurf_opts.png"/>
+          <p:cNvPr id="4" name="Picture 3" descr="dwdsurf_jwst_opts.png"/>
           <p:cNvPicPr>
             <a:picLocks noChangeAspect="1"/>
           </p:cNvPicPr>
@@ -4134,8 +4134,8 @@
         </p:blipFill>
         <p:spPr>
           <a:xfrm>
-            <a:off x="2525484" y="1298448"/>
-            <a:ext cx="7140726" cy="4177792"/>
+            <a:off x="2608113" y="1298448"/>
+            <a:ext cx="6975468" cy="4177792"/>
           </a:xfrm>
           <a:prstGeom prst="rect">
             <a:avLst/>
@@ -4176,7 +4176,7 @@
                 </a:solidFill>
                 <a:latin typeface="Arial"/>
               </a:rPr>
-              <a:t>The same Kr column with PTT removal (top row: mean and chief become identical, and a tilt now runs across all seven segments), raw orientation (bottom left: the same rays, transposed) and the wavefront sign (bottom right: negated).</a:t>
+              <a:t>The same Kr column with PTT removal (top row: mean and chief become identical, and a tilt now runs across all 18 segments), raw orientation (bottom left: the same rays with index 1 along global X, the spiders rotate) and the wavefront sign (bottom right: negated).</a:t>
             </a:r>
           </a:p>
         </p:txBody>
@@ -4215,7 +4215,7 @@
                 </a:solidFill>
                 <a:latin typeface="Arial"/>
               </a:rPr>
-              <a:t>remove_ptt fits global piston/tip/tilt to the whole column: the poked segment biases the fit, so the six unpoked segments trade a flat offset for a tilt and the reference choice no longer matters; orient raw = the engine array (index 1 along global X), xy = imagesc-ready; sign wavefront negates every wavefront output.</a:t>
+              <a:t>surf_remove_ptt fits global piston/tip/tilt to the whole column: the poked segment biases the fit, so the 17 unpoked segments trade a 4.4e-4 flat offset for a tilt of 7.0e-4 rms, and the reference choice no longer matters.  Orientation check: Seg2 sits at (X, Y) = (-1137, +657) mm and its footprint appears at (+10, -6.5) px from the pupil centre in the xy map, i.e. columns run along xGrid = -X and rows along yGrid = -Y (the deck's source frame; magnitudes match the exit-pupil scale).  'xy' fixes the transpose, not the sign of each axis.</a:t>
             </a:r>
           </a:p>
         </p:txBody>
@@ -4347,7 +4347,7 @@
         </p:nvGraphicFramePr>
         <p:xfrm>
           <a:off x="411480" y="1298448"/>
-          <a:ext cx="11368734" cy="1400175"/>
+          <a:ext cx="11368735" cy="2057400"/>
         </p:xfrm>
         <a:graphic>
           <a:graphicData uri="http://schemas.openxmlformats.org/drawingml/2006/table">
@@ -4358,8 +4358,8 @@
               <a:tblGrid>
                 <a:gridCol w="2180336"/>
                 <a:gridCol w="1889760"/>
-                <a:gridCol w="3892607"/>
-                <a:gridCol w="3406031"/>
+                <a:gridCol w="4293317"/>
+                <a:gridCol w="3005322"/>
               </a:tblGrid>
               <a:tr h="280035">
                 <a:tc>
@@ -4721,7 +4721,7 @@
                   </a:tcPr>
                 </a:tc>
               </a:tr>
-              <a:tr h="280035">
+              <a:tr h="468630">
                 <a:tc>
                   <a:txBody>
                     <a:bodyPr wrap="square"/>
@@ -4734,7 +4734,7 @@
                           </a:solidFill>
                           <a:latin typeface="Arial"/>
                         </a:rPr>
-                        <a:t>surf_remove_ptt / remove_ptt</a:t>
+                        <a:t>elts</a:t>
                       </a:r>
                     </a:p>
                   </a:txBody>
@@ -4756,7 +4756,7 @@
                           </a:solidFill>
                           <a:latin typeface="Arial"/>
                         </a:rPr>
-                        <a:t>false (default), true</a:t>
+                        <a:t>[] (all eligible), ids</a:t>
                       </a:r>
                     </a:p>
                   </a:txBody>
@@ -4778,7 +4778,7 @@
                           </a:solidFill>
                           <a:latin typeface="Arial"/>
                         </a:rPr>
-                        <a:t>dwdsurf driver + runner</a:t>
+                        <a:t>run_sensitivities -&gt; all four channels (dwdsurf was dropped)</a:t>
                       </a:r>
                     </a:p>
                   </a:txBody>
@@ -4800,7 +4800,7 @@
                           </a:solidFill>
                           <a:latin typeface="Arial"/>
                         </a:rPr>
-                        <a:t>false (not a substitute for the reference)</a:t>
+                        <a:t>the segments of interest</a:t>
                       </a:r>
                     </a:p>
                   </a:txBody>
@@ -4811,6 +4811,96 @@
                   </a:tcPr>
                 </a:tc>
               </a:tr>
+              <a:tr h="468630">
+                <a:tc>
+                  <a:txBody>
+                    <a:bodyPr wrap="square"/>
+                    <a:lstStyle/>
+                    <a:p>
+                      <a:r>
+                        <a:rPr sz="1100" b="0">
+                          <a:solidFill>
+                            <a:srgbClr val="282828"/>
+                          </a:solidFill>
+                          <a:latin typeface="Arial"/>
+                        </a:rPr>
+                        <a:t>surf_remove_ptt / remove_ptt</a:t>
+                      </a:r>
+                    </a:p>
+                  </a:txBody>
+                  <a:tcPr marL="54864" marR="54864" marT="18288" marB="18288">
+                    <a:solidFill>
+                      <a:srgbClr val="FFFFFF"/>
+                    </a:solidFill>
+                  </a:tcPr>
+                </a:tc>
+                <a:tc>
+                  <a:txBody>
+                    <a:bodyPr wrap="square"/>
+                    <a:lstStyle/>
+                    <a:p>
+                      <a:r>
+                        <a:rPr sz="1100" b="0">
+                          <a:solidFill>
+                            <a:srgbClr val="282828"/>
+                          </a:solidFill>
+                          <a:latin typeface="Arial"/>
+                        </a:rPr>
+                        <a:t>false (default), true</a:t>
+                      </a:r>
+                    </a:p>
+                  </a:txBody>
+                  <a:tcPr marL="54864" marR="54864" marT="18288" marB="18288">
+                    <a:solidFill>
+                      <a:srgbClr val="FFFFFF"/>
+                    </a:solidFill>
+                  </a:tcPr>
+                </a:tc>
+                <a:tc>
+                  <a:txBody>
+                    <a:bodyPr wrap="square"/>
+                    <a:lstStyle/>
+                    <a:p>
+                      <a:r>
+                        <a:rPr sz="1100" b="0">
+                          <a:solidFill>
+                            <a:srgbClr val="282828"/>
+                          </a:solidFill>
+                          <a:latin typeface="Arial"/>
+                        </a:rPr>
+                        <a:t>dwdsurf driver + runner</a:t>
+                      </a:r>
+                    </a:p>
+                  </a:txBody>
+                  <a:tcPr marL="54864" marR="54864" marT="18288" marB="18288">
+                    <a:solidFill>
+                      <a:srgbClr val="FFFFFF"/>
+                    </a:solidFill>
+                  </a:tcPr>
+                </a:tc>
+                <a:tc>
+                  <a:txBody>
+                    <a:bodyPr wrap="square"/>
+                    <a:lstStyle/>
+                    <a:p>
+                      <a:r>
+                        <a:rPr sz="1100" b="0">
+                          <a:solidFill>
+                            <a:srgbClr val="282828"/>
+                          </a:solidFill>
+                          <a:latin typeface="Arial"/>
+                        </a:rPr>
+                        <a:t>false (not a substitute for the reference)</a:t>
+                      </a:r>
+                    </a:p>
+                  </a:txBody>
+                  <a:tcPr marL="54864" marR="54864" marT="18288" marB="18288">
+                    <a:solidFill>
+                      <a:srgbClr val="FFFFFF"/>
+                    </a:solidFill>
+                  </a:tcPr>
+                </a:tc>
+              </a:tr>
             </a:tbl>
           </a:graphicData>
         </a:graphic>
@@ -4823,7 +4913,7 @@
         </p:nvSpPr>
         <p:spPr>
           <a:xfrm>
-            <a:off x="411480" y="2844927"/>
+            <a:off x="411480" y="3502152"/>
             <a:ext cx="11368735" cy="274320"/>
           </a:xfrm>
           <a:prstGeom prst="rect">
@@ -4849,7 +4939,7 @@
                 </a:solidFill>
                 <a:latin typeface="Arial"/>
               </a:rPr>
-              <a:t>run_sensitivities(RX, ..., 'channels', "dwdsurf", 'orient', 'xy', 'opd_ref', 'chief').  Re-applied after every Rx reload (a load resets the reference).  Open for Dave: the fixed nominal reference and the default flip (PLAN 0.x).</a:t>
+              <a:t>run_sensitivities(RX, ..., 'channels', "dwdsurf", 'elts', 5, 'orient', 'xy', 'opd_ref', 'chief').  The reference is re-applied after every Rx reload (a load resets it).  Open for Dave: the fixed nominal reference and the default flip (PLAN 0.x).</a:t>
             </a:r>
           </a:p>
         </p:txBody>

--- a/demo_session/deck_dwdsurf_options.pptx
+++ b/demo_session/deck_dwdsurf_options.pptx
@@ -3361,7 +3361,7 @@
                 </a:solidFill>
                 <a:latin typeface="Arial"/>
               </a:rPr>
-              <a:t>Kr and Kc columns of Seg2 under opd_ref = mean (left) and chief (right): the 17 unpoked segments carry a flat offset on the left and exactly nothing on the right; the colour scale is +-3x that offset, so the poked segment saturates.</a:t>
+              <a:t>Kr and Kc columns of Seg2 under opd_ref = mean (left) and chief (right): the 17 unpoked segments carry a flat offset on the left (the colour scale's top) and exactly zero on the right.</a:t>
             </a:r>
           </a:p>
         </p:txBody>
@@ -3400,7 +3400,7 @@
                 </a:solidFill>
                 <a:latin typeface="Arial"/>
               </a:rPr>
-              <a:t>Offset on the unpoked segments under mean = -(N_k/N) x mean(poked response): Kr 4.40e-4, Kc 1.66e-2 per unit parameter (5.4% / 4.5% of the poked segment's rms), equal on all 17 to 6e-16; the mean and chief columns differ by that one constant everywhere (1.4e-12 relative).  orient xy, sign opl, surf_remove_ptt off.</a:t>
+              <a:t>Offset on the unpoked segments under mean = -(N_k/N) x mean(poked response): Kr 4.40e-4, Kc 1.66e-2 per unit parameter (5.4% / 4.5% of the poked segment's rms), equal on all 17 to 6e-16; the mean and chief columns differ by that one constant everywhere (1.4e-12 relative).  orient xy, sign opl, surf_remove_ptt off; MATLAB jet colormap, autoscaled colour limits, as in Luis's plots.</a:t>
             </a:r>
           </a:p>
         </p:txBody>
@@ -4134,8 +4134,8 @@
         </p:blipFill>
         <p:spPr>
           <a:xfrm>
-            <a:off x="2608113" y="1298448"/>
-            <a:ext cx="6975468" cy="4177792"/>
+            <a:off x="2639190" y="1298448"/>
+            <a:ext cx="6913314" cy="4177792"/>
           </a:xfrm>
           <a:prstGeom prst="rect">
             <a:avLst/>

--- a/demo_session/deck_dwdsurf_options.pptx
+++ b/demo_session/deck_dwdsurf_options.pptx
@@ -10,6 +10,7 @@
     <p:sldId id="258" r:id="rId9"/>
     <p:sldId id="259" r:id="rId10"/>
     <p:sldId id="260" r:id="rId11"/>
+    <p:sldId id="261" r:id="rId12"/>
   </p:sldIdLst>
   <p:sldSz cx="12191695" cy="6858000" type="screen4x3"/>
   <p:notesSz cx="6858000" cy="9144000"/>
@@ -3254,7 +3255,7 @@
                 </a:solidFill>
                 <a:latin typeface="Arial"/>
               </a:rPr>
-              <a:t>mean reference: one constant on the other 17; chief reference: exactly zero</a:t>
+              <a:t>the runner's own centre-field page, unmodified: mean paints the other 17 segments, chief shows only the poked one</a:t>
             </a:r>
           </a:p>
         </p:txBody>
@@ -3305,7 +3306,7 @@
       </p:sp>
       <p:pic>
         <p:nvPicPr>
-          <p:cNvPr id="4" name="Picture 3" descr="dwdsurf_jwst_ref.png"/>
+          <p:cNvPr id="4" name="Picture 3" descr="dwdsurf_jwst_page_mean_xy.png"/>
           <p:cNvPicPr>
             <a:picLocks noChangeAspect="1"/>
           </p:cNvPicPr>
@@ -3319,8 +3320,8 @@
         </p:blipFill>
         <p:spPr>
           <a:xfrm>
-            <a:off x="2720448" y="1298448"/>
-            <a:ext cx="6750798" cy="4177792"/>
+            <a:off x="1449590" y="1298448"/>
+            <a:ext cx="3730218" cy="2531872"/>
           </a:xfrm>
           <a:prstGeom prst="rect">
             <a:avLst/>
@@ -3335,8 +3336,8 @@
         </p:nvSpPr>
         <p:spPr>
           <a:xfrm>
-            <a:off x="411480" y="5494528"/>
-            <a:ext cx="11368735" cy="394208"/>
+            <a:off x="411480" y="3848608"/>
+            <a:ext cx="5806440" cy="394208"/>
           </a:xfrm>
           <a:prstGeom prst="rect">
             <a:avLst/>
@@ -3361,20 +3362,83 @@
                 </a:solidFill>
                 <a:latin typeface="Arial"/>
               </a:rPr>
-              <a:t>Kr and Kc columns of Seg2 under opd_ref = mean (left) and chief (right): the 17 unpoked segments carry a flat offset on the left (the colour scale's top) and exactly zero on the right.</a:t>
-            </a:r>
-          </a:p>
-        </p:txBody>
-      </p:sp>
-      <p:sp>
-        <p:nvSpPr>
-          <p:cNvPr id="6" name="TextBox 5"/>
+              <a:t>opd_ref = mean: the 17 unpoked segments appear as one flat colour (the piston-removed constant), the poked Seg2 as the hexagon.</a:t>
+            </a:r>
+          </a:p>
+        </p:txBody>
+      </p:sp>
+      <p:pic>
+        <p:nvPicPr>
+          <p:cNvPr id="6" name="Picture 5" descr="dwdsurf_jwst_page_chief_xy.png"/>
+          <p:cNvPicPr>
+            <a:picLocks noChangeAspect="1"/>
+          </p:cNvPicPr>
+          <p:nvPr/>
+        </p:nvPicPr>
+        <p:blipFill>
+          <a:blip r:embed="rId3"/>
+          <a:stretch>
+            <a:fillRect/>
+          </a:stretch>
+        </p:blipFill>
+        <p:spPr>
+          <a:xfrm>
+            <a:off x="7233170" y="1298448"/>
+            <a:ext cx="3730218" cy="2531872"/>
+          </a:xfrm>
+          <a:prstGeom prst="rect">
+            <a:avLst/>
+          </a:prstGeom>
+        </p:spPr>
+      </p:pic>
+      <p:sp>
+        <p:nvSpPr>
+          <p:cNvPr id="7" name="TextBox 6"/>
           <p:cNvSpPr txBox="1"/>
           <p:nvPr/>
         </p:nvSpPr>
         <p:spPr>
           <a:xfrm>
-            <a:off x="411480" y="5925312"/>
+            <a:off x="6400800" y="3848608"/>
+            <a:ext cx="5394960" cy="394208"/>
+          </a:xfrm>
+          <a:prstGeom prst="rect">
+            <a:avLst/>
+          </a:prstGeom>
+          <a:noFill/>
+        </p:spPr>
+        <p:txBody>
+          <a:bodyPr wrap="square">
+            <a:spAutoFit/>
+          </a:bodyPr>
+          <a:lstStyle/>
+          <a:p>
+            <a:pPr algn="ctr">
+              <a:spcAft>
+                <a:spcPts val="0"/>
+              </a:spcAft>
+            </a:pPr>
+            <a:r>
+              <a:rPr sz="1000" b="0">
+                <a:solidFill>
+                  <a:srgbClr val="6E6E6E"/>
+                </a:solidFill>
+                <a:latin typeface="Arial"/>
+              </a:rPr>
+              <a:t>opd_ref = chief: the unpoked segments read exactly zero and are not drawn; only Seg2 remains.</a:t>
+            </a:r>
+          </a:p>
+        </p:txBody>
+      </p:sp>
+      <p:sp>
+        <p:nvSpPr>
+          <p:cNvPr id="8" name="TextBox 7"/>
+          <p:cNvSpPr txBox="1"/>
+          <p:nvPr/>
+        </p:nvSpPr>
+        <p:spPr>
+          <a:xfrm>
+            <a:off x="411480" y="4279392"/>
             <a:ext cx="11368735" cy="274320"/>
           </a:xfrm>
           <a:prstGeom prst="rect">
@@ -3400,7 +3464,7 @@
                 </a:solidFill>
                 <a:latin typeface="Arial"/>
               </a:rPr>
-              <a:t>Offset on the unpoked segments under mean = -(N_k/N) x mean(poked response): Kr 4.40e-4, Kc 1.66e-2 per unit parameter (5.4% / 4.5% of the poked segment's rms), equal on all 17 to 6e-16; the mean and chief columns differ by that one constant everywhere (1.4e-12 relative).  orient xy, sign opl, surf_remove_ptt off; MATLAB jet colormap, autoscaled colour limits, as in Luis's plots.</a:t>
+              <a:t>run_sensitivities pages (&lt;name&gt;_pages/*_elt5_center.png), orient xy, sign opl, surf_remove_ptt off, piston removed by the page plotter, MATLAB default colormap, autoscaled.  Under mean the offset on the unpoked segments is -(N_k/N) x mean(poked response): Kr 4.40e-4, Kc 1.66e-2 per unit parameter (5.4% / 4.5% of the poked segment's rms), equal on all 17 to 6e-16.</a:t>
             </a:r>
           </a:p>
         </p:txBody>
@@ -3414,6 +3478,288 @@
 </file>
 
 <file path=ppt/slides/slide3.xml><?xml version="1.0" encoding="utf-8"?>
+<p:sld xmlns:a="http://schemas.openxmlformats.org/drawingml/2006/main" xmlns:p="http://schemas.openxmlformats.org/presentationml/2006/main" xmlns:r="http://schemas.openxmlformats.org/officeDocument/2006/relationships">
+  <p:cSld>
+    <p:spTree>
+      <p:nvGrpSpPr>
+        <p:cNvPr id="1" name=""/>
+        <p:cNvGrpSpPr/>
+        <p:nvPr/>
+      </p:nvGrpSpPr>
+      <p:grpSpPr/>
+      <p:sp>
+        <p:nvSpPr>
+          <p:cNvPr id="2" name="TextBox 1"/>
+          <p:cNvSpPr txBox="1"/>
+          <p:nvPr/>
+        </p:nvSpPr>
+        <p:spPr>
+          <a:xfrm>
+            <a:off x="411480" y="201168"/>
+            <a:ext cx="11368735" cy="914400"/>
+          </a:xfrm>
+          <a:prstGeom prst="rect">
+            <a:avLst/>
+          </a:prstGeom>
+          <a:noFill/>
+        </p:spPr>
+        <p:txBody>
+          <a:bodyPr wrap="square">
+            <a:spAutoFit/>
+          </a:bodyPr>
+          <a:lstStyle/>
+          <a:p>
+            <a:pPr>
+              <a:spcAft>
+                <a:spcPts val="400"/>
+              </a:spcAft>
+            </a:pPr>
+            <a:r>
+              <a:rPr sz="2400" b="1">
+                <a:solidFill>
+                  <a:srgbClr val="1F4E79"/>
+                </a:solidFill>
+                <a:latin typeface="Arial"/>
+              </a:rPr>
+              <a:t>Under orient xy the page itself was scrambled</a:t>
+            </a:r>
+          </a:p>
+          <a:p>
+            <a:pPr>
+              <a:spcAft>
+                <a:spcPts val="0"/>
+              </a:spcAft>
+            </a:pPr>
+            <a:r>
+              <a:rPr sz="1250" b="0">
+                <a:solidFill>
+                  <a:srgbClr val="6E6E6E"/>
+                </a:solidFill>
+                <a:latin typeface="Arial"/>
+              </a:rPr>
+              <a:t>the same chief-reference page before and after the plotter fix; the raw-orientation page was always clean</a:t>
+            </a:r>
+          </a:p>
+        </p:txBody>
+      </p:sp>
+      <p:sp>
+        <p:nvSpPr>
+          <p:cNvPr id="3" name="Rectangle 2"/>
+          <p:cNvSpPr/>
+          <p:nvPr/>
+        </p:nvSpPr>
+        <p:spPr>
+          <a:xfrm>
+            <a:off x="411480" y="1133856"/>
+            <a:ext cx="11368735" cy="20320"/>
+          </a:xfrm>
+          <a:prstGeom prst="rect">
+            <a:avLst/>
+          </a:prstGeom>
+          <a:solidFill>
+            <a:srgbClr val="B8C6D4"/>
+          </a:solidFill>
+          <a:ln>
+            <a:noFill/>
+          </a:ln>
+          <a:effectLst/>
+        </p:spPr>
+        <p:style>
+          <a:lnRef idx="1">
+            <a:schemeClr val="accent1"/>
+          </a:lnRef>
+          <a:fillRef idx="3">
+            <a:schemeClr val="accent1"/>
+          </a:fillRef>
+          <a:effectRef idx="2">
+            <a:schemeClr val="accent1"/>
+          </a:effectRef>
+          <a:fontRef idx="minor">
+            <a:schemeClr val="lt1"/>
+          </a:fontRef>
+        </p:style>
+        <p:txBody>
+          <a:bodyPr rtlCol="0" anchor="ctr"/>
+          <a:lstStyle/>
+          <a:p>
+            <a:pPr algn="ctr"/>
+          </a:p>
+        </p:txBody>
+      </p:sp>
+      <p:pic>
+        <p:nvPicPr>
+          <p:cNvPr id="4" name="Picture 3" descr="dwdsurf_jwst_page_chief_xy_OLD.png"/>
+          <p:cNvPicPr>
+            <a:picLocks noChangeAspect="1"/>
+          </p:cNvPicPr>
+          <p:nvPr/>
+        </p:nvPicPr>
+        <p:blipFill>
+          <a:blip r:embed="rId2"/>
+          <a:stretch>
+            <a:fillRect/>
+          </a:stretch>
+        </p:blipFill>
+        <p:spPr>
+          <a:xfrm>
+            <a:off x="1449590" y="1298448"/>
+            <a:ext cx="3730218" cy="2531872"/>
+          </a:xfrm>
+          <a:prstGeom prst="rect">
+            <a:avLst/>
+          </a:prstGeom>
+        </p:spPr>
+      </p:pic>
+      <p:sp>
+        <p:nvSpPr>
+          <p:cNvPr id="5" name="TextBox 4"/>
+          <p:cNvSpPr txBox="1"/>
+          <p:nvPr/>
+        </p:nvSpPr>
+        <p:spPr>
+          <a:xfrm>
+            <a:off x="411480" y="3848608"/>
+            <a:ext cx="5806440" cy="394208"/>
+          </a:xfrm>
+          <a:prstGeom prst="rect">
+            <a:avLst/>
+          </a:prstGeom>
+          <a:noFill/>
+        </p:spPr>
+        <p:txBody>
+          <a:bodyPr wrap="square">
+            <a:spAutoFit/>
+          </a:bodyPr>
+          <a:lstStyle/>
+          <a:p>
+            <a:pPr algn="ctr">
+              <a:spcAft>
+                <a:spcPts val="0"/>
+              </a:spcAft>
+            </a:pPr>
+            <a:r>
+              <a:rPr sz="1000" b="0">
+                <a:solidFill>
+                  <a:srgbClr val="6E6E6E"/>
+                </a:solidFill>
+                <a:latin typeface="Arial"/>
+              </a:rPr>
+              <a:t>Before: the centre-field page rebuilt its pixel index from the transposed nominal map, so the rows landed on the wrong pixels and the hexagon smeared into streaks.</a:t>
+            </a:r>
+          </a:p>
+        </p:txBody>
+      </p:sp>
+      <p:pic>
+        <p:nvPicPr>
+          <p:cNvPr id="6" name="Picture 5" descr="dwdsurf_jwst_page_chief_xy.png"/>
+          <p:cNvPicPr>
+            <a:picLocks noChangeAspect="1"/>
+          </p:cNvPicPr>
+          <p:nvPr/>
+        </p:nvPicPr>
+        <p:blipFill>
+          <a:blip r:embed="rId3"/>
+          <a:stretch>
+            <a:fillRect/>
+          </a:stretch>
+        </p:blipFill>
+        <p:spPr>
+          <a:xfrm>
+            <a:off x="7233170" y="1298448"/>
+            <a:ext cx="3730218" cy="2531872"/>
+          </a:xfrm>
+          <a:prstGeom prst="rect">
+            <a:avLst/>
+          </a:prstGeom>
+        </p:spPr>
+      </p:pic>
+      <p:sp>
+        <p:nvSpPr>
+          <p:cNvPr id="7" name="TextBox 6"/>
+          <p:cNvSpPr txBox="1"/>
+          <p:nvPr/>
+        </p:nvSpPr>
+        <p:spPr>
+          <a:xfrm>
+            <a:off x="6400800" y="3848608"/>
+            <a:ext cx="5394960" cy="394208"/>
+          </a:xfrm>
+          <a:prstGeom prst="rect">
+            <a:avLst/>
+          </a:prstGeom>
+          <a:noFill/>
+        </p:spPr>
+        <p:txBody>
+          <a:bodyPr wrap="square">
+            <a:spAutoFit/>
+          </a:bodyPr>
+          <a:lstStyle/>
+          <a:p>
+            <a:pPr algn="ctr">
+              <a:spcAft>
+                <a:spcPts val="0"/>
+              </a:spcAft>
+            </a:pPr>
+            <a:r>
+              <a:rPr sz="1000" b="0">
+                <a:solidFill>
+                  <a:srgbClr val="6E6E6E"/>
+                </a:solidFill>
+                <a:latin typeface="Arial"/>
+              </a:rPr>
+              <a:t>After: the index is built on the raw-orientation map and remapped with the same rule as the harvest; the xy page is the raw page transposed, exactly.</a:t>
+            </a:r>
+          </a:p>
+        </p:txBody>
+      </p:sp>
+      <p:sp>
+        <p:nvSpPr>
+          <p:cNvPr id="8" name="TextBox 7"/>
+          <p:cNvSpPr txBox="1"/>
+          <p:nvPr/>
+        </p:nvSpPr>
+        <p:spPr>
+          <a:xfrm>
+            <a:off x="411480" y="4279392"/>
+            <a:ext cx="11368735" cy="274320"/>
+          </a:xfrm>
+          <a:prstGeom prst="rect">
+            <a:avLst/>
+          </a:prstGeom>
+          <a:noFill/>
+        </p:spPr>
+        <p:txBody>
+          <a:bodyPr wrap="square">
+            <a:spAutoFit/>
+          </a:bodyPr>
+          <a:lstStyle/>
+          <a:p>
+            <a:pPr>
+              <a:spcAft>
+                <a:spcPts val="600"/>
+              </a:spcAft>
+            </a:pPr>
+            <a:r>
+              <a:rPr sz="1050" b="0">
+                <a:solidFill>
+                  <a:srgbClr val="6E6E6E"/>
+                </a:solidFill>
+                <a:latin typeface="Arial"/>
+              </a:rPr>
+              <a:t>sensitivities/per_field_indx.m; gate tRunSensitivities/test_per_element_page_index_follows_orient_xy (xy page == raw page transposed to 0; the old recipe differs by more than 10% of the map).  This is the picture Luis was reading as a residual.</a:t>
+            </a:r>
+          </a:p>
+        </p:txBody>
+      </p:sp>
+    </p:spTree>
+  </p:cSld>
+  <p:clrMapOvr>
+    <a:masterClrMapping/>
+  </p:clrMapOvr>
+</p:sld>
+</file>
+
+<file path=ppt/slides/slide4.xml><?xml version="1.0" encoding="utf-8"?>
 <p:sld xmlns:a="http://schemas.openxmlformats.org/drawingml/2006/main" xmlns:p="http://schemas.openxmlformats.org/presentationml/2006/main" xmlns:r="http://schemas.openxmlformats.org/officeDocument/2006/relationships">
   <p:cSld>
     <p:spTree>
@@ -4009,7 +4355,7 @@
 </p:sld>
 </file>
 
-<file path=ppt/slides/slide4.xml><?xml version="1.0" encoding="utf-8"?>
+<file path=ppt/slides/slide5.xml><?xml version="1.0" encoding="utf-8"?>
 <p:sld xmlns:a="http://schemas.openxmlformats.org/drawingml/2006/main" xmlns:p="http://schemas.openxmlformats.org/presentationml/2006/main" xmlns:r="http://schemas.openxmlformats.org/officeDocument/2006/relationships">
   <p:cSld>
     <p:spTree>
@@ -4228,7 +4574,7 @@
 </p:sld>
 </file>
 
-<file path=ppt/slides/slide5.xml><?xml version="1.0" encoding="utf-8"?>
+<file path=ppt/slides/slide6.xml><?xml version="1.0" encoding="utf-8"?>
 <p:sld xmlns:a="http://schemas.openxmlformats.org/drawingml/2006/main" xmlns:p="http://schemas.openxmlformats.org/presentationml/2006/main" xmlns:r="http://schemas.openxmlformats.org/officeDocument/2006/relationships">
   <p:cSld>
     <p:spTree>

--- a/demo_session/deck_dwdsurf_options.pptx
+++ b/demo_session/deck_dwdsurf_options.pptx
@@ -11,6 +11,7 @@
     <p:sldId id="259" r:id="rId10"/>
     <p:sldId id="260" r:id="rId11"/>
     <p:sldId id="261" r:id="rId12"/>
+    <p:sldId id="262" r:id="rId13"/>
   </p:sldIdLst>
   <p:sldSz cx="12191695" cy="6858000" type="screen4x3"/>
   <p:notesSz cx="6858000" cy="9144000"/>
@@ -3182,7 +3183,7 @@
                 </a:solidFill>
                 <a:latin typeface="Arial"/>
               </a:rPr>
-              <a:t>DRAFT 2026-09-09.  Every option shown is a run_sensitivities option since this date ('orient', 'sign', 'opd_ref', and 'elts' now reach the dwdsurf channel).  Numbers: dW/dp per unit parameter, mm of OPD per mm (Kr) / per unit (Kc), centre field, single configuration.</a:t>
+              <a:t>DRAFT 2026-09-10.  Every figure is the runner's own centre-field page (&lt;name&gt;_pages/*_elt5_center.png), unmodified: MATLAB default colormap, autoscaled, piston removed by the page plotter, zeros not drawn.  Every option shown is a run_sensitivities option since 2026-09-09 ('orient', 'sign', 'opd_ref', and 'elts' now reach the dwdsurf channel).  Numbers: dW/dp per unit parameter, mm of OPD per mm (Kr) / per unit (Kc), centre field, single configuration.</a:t>
             </a:r>
           </a:p>
         </p:txBody>
@@ -4399,7 +4400,7 @@
                 </a:solidFill>
                 <a:latin typeface="Arial"/>
               </a:rPr>
-              <a:t>The other options do not remove the leak; they relabel it</a:t>
+              <a:t>PTT removal does not remove the leak; it relabels it as a tilt</a:t>
             </a:r>
           </a:p>
           <a:p>
@@ -4415,7 +4416,7 @@
                 </a:solidFill>
                 <a:latin typeface="Arial"/>
               </a:rPr>
-              <a:t>PTT removal fits the whole column, orientation transposes, sign negates</a:t>
+              <a:t>with surf_remove_ptt on, the mean and chief pages become identical and a tilt runs across all 18 segments</a:t>
             </a:r>
           </a:p>
         </p:txBody>
@@ -4466,7 +4467,7 @@
       </p:sp>
       <p:pic>
         <p:nvPicPr>
-          <p:cNvPr id="4" name="Picture 3" descr="dwdsurf_jwst_opts.png"/>
+          <p:cNvPr id="4" name="Picture 3" descr="dwdsurf_jwst_page_mean_ptt.png"/>
           <p:cNvPicPr>
             <a:picLocks noChangeAspect="1"/>
           </p:cNvPicPr>
@@ -4480,8 +4481,8 @@
         </p:blipFill>
         <p:spPr>
           <a:xfrm>
-            <a:off x="2639190" y="1298448"/>
-            <a:ext cx="6913314" cy="4177792"/>
+            <a:off x="1449590" y="1298448"/>
+            <a:ext cx="3730218" cy="2531872"/>
           </a:xfrm>
           <a:prstGeom prst="rect">
             <a:avLst/>
@@ -4496,8 +4497,8 @@
         </p:nvSpPr>
         <p:spPr>
           <a:xfrm>
-            <a:off x="411480" y="5494528"/>
-            <a:ext cx="11368735" cy="394208"/>
+            <a:off x="411480" y="3848608"/>
+            <a:ext cx="5806440" cy="394208"/>
           </a:xfrm>
           <a:prstGeom prst="rect">
             <a:avLst/>
@@ -4522,20 +4523,83 @@
                 </a:solidFill>
                 <a:latin typeface="Arial"/>
               </a:rPr>
-              <a:t>The same Kr column with PTT removal (top row: mean and chief become identical, and a tilt now runs across all 18 segments), raw orientation (bottom left: the same rays with index 1 along global X, the spiders rotate) and the wavefront sign (bottom right: negated).</a:t>
-            </a:r>
-          </a:p>
-        </p:txBody>
-      </p:sp>
-      <p:sp>
-        <p:nvSpPr>
-          <p:cNvPr id="6" name="TextBox 5"/>
+              <a:t>surf_remove_ptt = true, opd_ref = mean: the 17 unpoked segments carry a tilt instead of a flat offset.</a:t>
+            </a:r>
+          </a:p>
+        </p:txBody>
+      </p:sp>
+      <p:pic>
+        <p:nvPicPr>
+          <p:cNvPr id="6" name="Picture 5" descr="dwdsurf_jwst_page_chief_ptt.png"/>
+          <p:cNvPicPr>
+            <a:picLocks noChangeAspect="1"/>
+          </p:cNvPicPr>
+          <p:nvPr/>
+        </p:nvPicPr>
+        <p:blipFill>
+          <a:blip r:embed="rId3"/>
+          <a:stretch>
+            <a:fillRect/>
+          </a:stretch>
+        </p:blipFill>
+        <p:spPr>
+          <a:xfrm>
+            <a:off x="7233170" y="1298448"/>
+            <a:ext cx="3730218" cy="2531872"/>
+          </a:xfrm>
+          <a:prstGeom prst="rect">
+            <a:avLst/>
+          </a:prstGeom>
+        </p:spPr>
+      </p:pic>
+      <p:sp>
+        <p:nvSpPr>
+          <p:cNvPr id="7" name="TextBox 6"/>
           <p:cNvSpPr txBox="1"/>
           <p:nvPr/>
         </p:nvSpPr>
         <p:spPr>
           <a:xfrm>
-            <a:off x="411480" y="5925312"/>
+            <a:off x="6400800" y="3848608"/>
+            <a:ext cx="5394960" cy="394208"/>
+          </a:xfrm>
+          <a:prstGeom prst="rect">
+            <a:avLst/>
+          </a:prstGeom>
+          <a:noFill/>
+        </p:spPr>
+        <p:txBody>
+          <a:bodyPr wrap="square">
+            <a:spAutoFit/>
+          </a:bodyPr>
+          <a:lstStyle/>
+          <a:p>
+            <a:pPr algn="ctr">
+              <a:spcAft>
+                <a:spcPts val="0"/>
+              </a:spcAft>
+            </a:pPr>
+            <a:r>
+              <a:rPr sz="1000" b="0">
+                <a:solidFill>
+                  <a:srgbClr val="6E6E6E"/>
+                </a:solidFill>
+                <a:latin typeface="Arial"/>
+              </a:rPr>
+              <a:t>surf_remove_ptt = true, opd_ref = chief: identical to the mean page, the global piston/tip/tilt fit has absorbed the reference difference.</a:t>
+            </a:r>
+          </a:p>
+        </p:txBody>
+      </p:sp>
+      <p:sp>
+        <p:nvSpPr>
+          <p:cNvPr id="8" name="TextBox 7"/>
+          <p:cNvSpPr txBox="1"/>
+          <p:nvPr/>
+        </p:nvSpPr>
+        <p:spPr>
+          <a:xfrm>
+            <a:off x="411480" y="4279392"/>
             <a:ext cx="11368735" cy="274320"/>
           </a:xfrm>
           <a:prstGeom prst="rect">
@@ -4561,7 +4625,7 @@
                 </a:solidFill>
                 <a:latin typeface="Arial"/>
               </a:rPr>
-              <a:t>surf_remove_ptt fits global piston/tip/tilt to the whole column: the poked segment biases the fit, so the 17 unpoked segments trade a 4.4e-4 flat offset for a tilt of 7.0e-4 rms, and the reference choice no longer matters.  Orientation check: Seg2 sits at (X, Y) = (-1137, +657) mm and its footprint appears at (+10, -6.5) px from the pupil centre in the xy map, i.e. columns run along xGrid = -X and rows along yGrid = -Y (the deck's source frame; magnitudes match the exit-pupil scale).  'xy' fixes the transpose, not the sign of each axis.</a:t>
+              <a:t>Runner pages, unmodified.  The fit is global, so the poked segment biases it: the unpoked segments' rms goes from 4.4e-4 (flat offset under mean) to 7.0e-4 (tilt), the same under either reference.</a:t>
             </a:r>
           </a:p>
         </p:txBody>
@@ -4575,6 +4639,288 @@
 </file>
 
 <file path=ppt/slides/slide6.xml><?xml version="1.0" encoding="utf-8"?>
+<p:sld xmlns:a="http://schemas.openxmlformats.org/drawingml/2006/main" xmlns:p="http://schemas.openxmlformats.org/presentationml/2006/main" xmlns:r="http://schemas.openxmlformats.org/officeDocument/2006/relationships">
+  <p:cSld>
+    <p:spTree>
+      <p:nvGrpSpPr>
+        <p:cNvPr id="1" name=""/>
+        <p:cNvGrpSpPr/>
+        <p:nvPr/>
+      </p:nvGrpSpPr>
+      <p:grpSpPr/>
+      <p:sp>
+        <p:nvSpPr>
+          <p:cNvPr id="2" name="TextBox 1"/>
+          <p:cNvSpPr txBox="1"/>
+          <p:nvPr/>
+        </p:nvSpPr>
+        <p:spPr>
+          <a:xfrm>
+            <a:off x="411480" y="201168"/>
+            <a:ext cx="11368735" cy="914400"/>
+          </a:xfrm>
+          <a:prstGeom prst="rect">
+            <a:avLst/>
+          </a:prstGeom>
+          <a:noFill/>
+        </p:spPr>
+        <p:txBody>
+          <a:bodyPr wrap="square">
+            <a:spAutoFit/>
+          </a:bodyPr>
+          <a:lstStyle/>
+          <a:p>
+            <a:pPr>
+              <a:spcAft>
+                <a:spcPts val="400"/>
+              </a:spcAft>
+            </a:pPr>
+            <a:r>
+              <a:rPr sz="2400" b="1">
+                <a:solidFill>
+                  <a:srgbClr val="1F4E79"/>
+                </a:solidFill>
+                <a:latin typeface="Arial"/>
+              </a:rPr>
+              <a:t>Orientation transposes the array; sign negates it</a:t>
+            </a:r>
+          </a:p>
+          <a:p>
+            <a:pPr>
+              <a:spcAft>
+                <a:spcPts val="0"/>
+              </a:spcAft>
+            </a:pPr>
+            <a:r>
+              <a:rPr sz="1250" b="0">
+                <a:solidFill>
+                  <a:srgbClr val="6E6E6E"/>
+                </a:solidFill>
+                <a:latin typeface="Arial"/>
+              </a:rPr>
+              <a:t>raw is the engine array (index 1 along global X), xy is its transpose; wavefront is opl negated</a:t>
+            </a:r>
+          </a:p>
+        </p:txBody>
+      </p:sp>
+      <p:sp>
+        <p:nvSpPr>
+          <p:cNvPr id="3" name="Rectangle 2"/>
+          <p:cNvSpPr/>
+          <p:nvPr/>
+        </p:nvSpPr>
+        <p:spPr>
+          <a:xfrm>
+            <a:off x="411480" y="1133856"/>
+            <a:ext cx="11368735" cy="20320"/>
+          </a:xfrm>
+          <a:prstGeom prst="rect">
+            <a:avLst/>
+          </a:prstGeom>
+          <a:solidFill>
+            <a:srgbClr val="B8C6D4"/>
+          </a:solidFill>
+          <a:ln>
+            <a:noFill/>
+          </a:ln>
+          <a:effectLst/>
+        </p:spPr>
+        <p:style>
+          <a:lnRef idx="1">
+            <a:schemeClr val="accent1"/>
+          </a:lnRef>
+          <a:fillRef idx="3">
+            <a:schemeClr val="accent1"/>
+          </a:fillRef>
+          <a:effectRef idx="2">
+            <a:schemeClr val="accent1"/>
+          </a:effectRef>
+          <a:fontRef idx="minor">
+            <a:schemeClr val="lt1"/>
+          </a:fontRef>
+        </p:style>
+        <p:txBody>
+          <a:bodyPr rtlCol="0" anchor="ctr"/>
+          <a:lstStyle/>
+          <a:p>
+            <a:pPr algn="ctr"/>
+          </a:p>
+        </p:txBody>
+      </p:sp>
+      <p:pic>
+        <p:nvPicPr>
+          <p:cNvPr id="4" name="Picture 3" descr="dwdsurf_jwst_page_mean_raw.png"/>
+          <p:cNvPicPr>
+            <a:picLocks noChangeAspect="1"/>
+          </p:cNvPicPr>
+          <p:nvPr/>
+        </p:nvPicPr>
+        <p:blipFill>
+          <a:blip r:embed="rId2"/>
+          <a:stretch>
+            <a:fillRect/>
+          </a:stretch>
+        </p:blipFill>
+        <p:spPr>
+          <a:xfrm>
+            <a:off x="1449590" y="1298448"/>
+            <a:ext cx="3730218" cy="2531872"/>
+          </a:xfrm>
+          <a:prstGeom prst="rect">
+            <a:avLst/>
+          </a:prstGeom>
+        </p:spPr>
+      </p:pic>
+      <p:sp>
+        <p:nvSpPr>
+          <p:cNvPr id="5" name="TextBox 4"/>
+          <p:cNvSpPr txBox="1"/>
+          <p:nvPr/>
+        </p:nvSpPr>
+        <p:spPr>
+          <a:xfrm>
+            <a:off x="411480" y="3848608"/>
+            <a:ext cx="5806440" cy="394208"/>
+          </a:xfrm>
+          <a:prstGeom prst="rect">
+            <a:avLst/>
+          </a:prstGeom>
+          <a:noFill/>
+        </p:spPr>
+        <p:txBody>
+          <a:bodyPr wrap="square">
+            <a:spAutoFit/>
+          </a:bodyPr>
+          <a:lstStyle/>
+          <a:p>
+            <a:pPr algn="ctr">
+              <a:spcAft>
+                <a:spcPts val="0"/>
+              </a:spcAft>
+            </a:pPr>
+            <a:r>
+              <a:rPr sz="1000" b="0">
+                <a:solidFill>
+                  <a:srgbClr val="6E6E6E"/>
+                </a:solidFill>
+                <a:latin typeface="Arial"/>
+              </a:rPr>
+              <a:t>orient = raw, opd_ref = mean: the same rays as the xy page, transposed (the spider arms rotate); the unpoked segments carry the same flat offset.</a:t>
+            </a:r>
+          </a:p>
+        </p:txBody>
+      </p:sp>
+      <p:pic>
+        <p:nvPicPr>
+          <p:cNvPr id="6" name="Picture 5" descr="dwdsurf_jwst_page_chief_wf.png"/>
+          <p:cNvPicPr>
+            <a:picLocks noChangeAspect="1"/>
+          </p:cNvPicPr>
+          <p:nvPr/>
+        </p:nvPicPr>
+        <p:blipFill>
+          <a:blip r:embed="rId3"/>
+          <a:stretch>
+            <a:fillRect/>
+          </a:stretch>
+        </p:blipFill>
+        <p:spPr>
+          <a:xfrm>
+            <a:off x="7233170" y="1298448"/>
+            <a:ext cx="3730218" cy="2531872"/>
+          </a:xfrm>
+          <a:prstGeom prst="rect">
+            <a:avLst/>
+          </a:prstGeom>
+        </p:spPr>
+      </p:pic>
+      <p:sp>
+        <p:nvSpPr>
+          <p:cNvPr id="7" name="TextBox 6"/>
+          <p:cNvSpPr txBox="1"/>
+          <p:nvPr/>
+        </p:nvSpPr>
+        <p:spPr>
+          <a:xfrm>
+            <a:off x="6400800" y="3848608"/>
+            <a:ext cx="5394960" cy="394208"/>
+          </a:xfrm>
+          <a:prstGeom prst="rect">
+            <a:avLst/>
+          </a:prstGeom>
+          <a:noFill/>
+        </p:spPr>
+        <p:txBody>
+          <a:bodyPr wrap="square">
+            <a:spAutoFit/>
+          </a:bodyPr>
+          <a:lstStyle/>
+          <a:p>
+            <a:pPr algn="ctr">
+              <a:spcAft>
+                <a:spcPts val="0"/>
+              </a:spcAft>
+            </a:pPr>
+            <a:r>
+              <a:rPr sz="1000" b="0">
+                <a:solidFill>
+                  <a:srgbClr val="6E6E6E"/>
+                </a:solidFill>
+                <a:latin typeface="Arial"/>
+              </a:rPr>
+              <a:t>sign = wavefront, opd_ref = chief, orient xy: the poked segment's response negated, nothing else drawn.</a:t>
+            </a:r>
+          </a:p>
+        </p:txBody>
+      </p:sp>
+      <p:sp>
+        <p:nvSpPr>
+          <p:cNvPr id="8" name="TextBox 7"/>
+          <p:cNvSpPr txBox="1"/>
+          <p:nvPr/>
+        </p:nvSpPr>
+        <p:spPr>
+          <a:xfrm>
+            <a:off x="411480" y="4279392"/>
+            <a:ext cx="11368735" cy="274320"/>
+          </a:xfrm>
+          <a:prstGeom prst="rect">
+            <a:avLst/>
+          </a:prstGeom>
+          <a:noFill/>
+        </p:spPr>
+        <p:txBody>
+          <a:bodyPr wrap="square">
+            <a:spAutoFit/>
+          </a:bodyPr>
+          <a:lstStyle/>
+          <a:p>
+            <a:pPr>
+              <a:spcAft>
+                <a:spcPts val="600"/>
+              </a:spcAft>
+            </a:pPr>
+            <a:r>
+              <a:rPr sz="1050" b="0">
+                <a:solidFill>
+                  <a:srgbClr val="6E6E6E"/>
+                </a:solidFill>
+                <a:latin typeface="Arial"/>
+              </a:rPr>
+              <a:t>Runner pages, unmodified.  Orientation anchor: Seg2 sits at (X, Y) = (-1137, +657) mm; in the xy page its footprint is at (+10, -6.5) px from the pupil centre, i.e. columns run along xGrid = -X and rows along yGrid = -Y (the deck's source frame).  'xy' fixes the transpose, not the sign of each axis.</a:t>
+            </a:r>
+          </a:p>
+        </p:txBody>
+      </p:sp>
+    </p:spTree>
+  </p:cSld>
+  <p:clrMapOvr>
+    <a:masterClrMapping/>
+  </p:clrMapOvr>
+</p:sld>
+</file>
+
+<file path=ppt/slides/slide7.xml><?xml version="1.0" encoding="utf-8"?>
 <p:sld xmlns:a="http://schemas.openxmlformats.org/drawingml/2006/main" xmlns:p="http://schemas.openxmlformats.org/presentationml/2006/main" xmlns:r="http://schemas.openxmlformats.org/officeDocument/2006/relationships">
   <p:cSld>
     <p:spTree>

--- a/demo_session/deck_dwdsurf_options.pptx
+++ b/demo_session/deck_dwdsurf_options.pptx
@@ -3183,7 +3183,7 @@
                 </a:solidFill>
                 <a:latin typeface="Arial"/>
               </a:rPr>
-              <a:t>DRAFT 2026-09-10.  Every figure is the runner's own centre-field page (&lt;name&gt;_pages/*_elt5_center.png), unmodified: MATLAB default colormap, autoscaled, piston removed by the page plotter, zeros not drawn.  Every option shown is a run_sensitivities option since 2026-09-09 ('orient', 'sign', 'opd_ref', and 'elts' now reach the dwdsurf channel).  Numbers: dW/dp per unit parameter, mm of OPD per mm (Kr) / per unit (Kc), centre field, single configuration.</a:t>
+              <a:t>DRAFT 2026-09-10.  Every figure is the runner's own centre-field page (&lt;name&gt;_pages/*_elt5_center.png), unmodified: colormap jet, autoscaled, piston removed by the page plotter, zeros not drawn.  Every option shown is a run_sensitivities option since 2026-09-09 ('orient', 'sign', 'opd_ref', and 'elts' now reach the dwdsurf channel).  Numbers: dW/dp per unit parameter, mm of OPD per mm (Kr) / per unit (Kc), centre field, single configuration.</a:t>
             </a:r>
           </a:p>
         </p:txBody>
@@ -3256,7 +3256,7 @@
                 </a:solidFill>
                 <a:latin typeface="Arial"/>
               </a:rPr>
-              <a:t>the runner's own centre-field page, unmodified: mean paints the other 17 segments, chief shows only the poked one</a:t>
+              <a:t>the same correct data under two references: mean paints the other 17 segments one flat colour, chief shows only the poked one</a:t>
             </a:r>
           </a:p>
         </p:txBody>
@@ -3465,7 +3465,7 @@
                 </a:solidFill>
                 <a:latin typeface="Arial"/>
               </a:rPr>
-              <a:t>run_sensitivities pages (&lt;name&gt;_pages/*_elt5_center.png), orient xy, sign opl, surf_remove_ptt off, piston removed by the page plotter, MATLAB default colormap, autoscaled.  Under mean the offset on the unpoked segments is -(N_k/N) x mean(poked response): Kr 4.40e-4, Kc 1.66e-2 per unit parameter (5.4% / 4.5% of the poked segment's rms), equal on all 17 to 6e-16.</a:t>
+              <a:t>run_sensitivities pages (&lt;name&gt;_pages/*_elt5_center.png), orient xy, sign opl, surf_remove_ptt off, piston removed by the page plotter, jet, autoscaled.  The two columns differ by one constant everywhere (neither is wrong); under mean the constant the unpoked segments carry is -(N_k/N) x mean(poked response): Kr 4.40e-4, Kc 1.66e-2 per unit parameter (5.4% / 4.5% of the poked segment's rms), equal on all 17 to 6e-16.</a:t>
             </a:r>
           </a:p>
         </p:txBody>
@@ -3820,7 +3820,7 @@
                 </a:solidFill>
                 <a:latin typeface="Arial"/>
               </a:rPr>
-              <a:t>poking one segment moves the aperture-mean reference; the chief ray's does not move unless its own segment is poked</a:t>
+              <a:t>poking one segment moves the aperture-mean reference; the chief ray's does not move unless its own segment is poked -- a convention, not an error</a:t>
             </a:r>
           </a:p>
         </p:txBody>
@@ -4400,7 +4400,7 @@
                 </a:solidFill>
                 <a:latin typeface="Arial"/>
               </a:rPr>
-              <a:t>PTT removal does not remove the leak; it relabels it as a tilt</a:t>
+              <a:t>PTT removal is a third convention on the same data</a:t>
             </a:r>
           </a:p>
           <a:p>
@@ -4416,7 +4416,7 @@
                 </a:solidFill>
                 <a:latin typeface="Arial"/>
               </a:rPr>
-              <a:t>with surf_remove_ptt on, the mean and chief pages become identical and a tilt runs across all 18 segments</a:t>
+              <a:t>with surf_remove_ptt on, the mean and chief pages become identical and the unpoked segments show a tilt instead of a flat offset</a:t>
             </a:r>
           </a:p>
         </p:txBody>
@@ -4523,7 +4523,7 @@
                 </a:solidFill>
                 <a:latin typeface="Arial"/>
               </a:rPr>
-              <a:t>surf_remove_ptt = true, opd_ref = mean: the 17 unpoked segments carry a tilt instead of a flat offset.</a:t>
+              <a:t>surf_remove_ptt = true, opd_ref = mean: the 17 unpoked segments show a tilt instead of a flat offset.</a:t>
             </a:r>
           </a:p>
         </p:txBody>
@@ -4625,7 +4625,7 @@
                 </a:solidFill>
                 <a:latin typeface="Arial"/>
               </a:rPr>
-              <a:t>Runner pages, unmodified.  The fit is global, so the poked segment biases it: the unpoked segments' rms goes from 4.4e-4 (flat offset under mean) to 7.0e-4 (tilt), the same under either reference.</a:t>
+              <a:t>Runner pages, unmodified.  The fit is global, so the poked segment sets it: the unpoked segments' rms is 7.0e-4 (a tilt) against 4.4e-4 (the flat offset under mean), the same under either reference.  Pick the convention the consumer expects; none of the three is an error.</a:t>
             </a:r>
           </a:p>
         </p:txBody>
@@ -5039,7 +5039,7 @@
         </p:nvGraphicFramePr>
         <p:xfrm>
           <a:off x="411480" y="1298448"/>
-          <a:ext cx="11368735" cy="2057400"/>
+          <a:ext cx="11368734" cy="1680210"/>
         </p:xfrm>
         <a:graphic>
           <a:graphicData uri="http://schemas.openxmlformats.org/drawingml/2006/table">
@@ -5050,8 +5050,8 @@
               <a:tblGrid>
                 <a:gridCol w="2180336"/>
                 <a:gridCol w="1889760"/>
-                <a:gridCol w="4293317"/>
-                <a:gridCol w="3005322"/>
+                <a:gridCol w="4379183"/>
+                <a:gridCol w="2919455"/>
               </a:tblGrid>
               <a:tr h="280035">
                 <a:tc>
@@ -5222,7 +5222,7 @@
                           </a:solidFill>
                           <a:latin typeface="Arial"/>
                         </a:rPr>
-                        <a:t>chief</a:t>
+                        <a:t>chief, if unpoked segments should read 0</a:t>
                       </a:r>
                     </a:p>
                   </a:txBody>
@@ -5413,7 +5413,7 @@
                   </a:tcPr>
                 </a:tc>
               </a:tr>
-              <a:tr h="468630">
+              <a:tr h="280035">
                 <a:tc>
                   <a:txBody>
                     <a:bodyPr wrap="square"/>
@@ -5503,7 +5503,7 @@
                   </a:tcPr>
                 </a:tc>
               </a:tr>
-              <a:tr h="468630">
+              <a:tr h="280035">
                 <a:tc>
                   <a:txBody>
                     <a:bodyPr wrap="square"/>
@@ -5582,7 +5582,7 @@
                           </a:solidFill>
                           <a:latin typeface="Arial"/>
                         </a:rPr>
-                        <a:t>false (not a substitute for the reference)</a:t>
+                        <a:t>as the consumer expects</a:t>
                       </a:r>
                     </a:p>
                   </a:txBody>
@@ -5605,7 +5605,7 @@
         </p:nvSpPr>
         <p:spPr>
           <a:xfrm>
-            <a:off x="411480" y="3502152"/>
+            <a:off x="411480" y="3124962"/>
             <a:ext cx="11368735" cy="274320"/>
           </a:xfrm>
           <a:prstGeom prst="rect">
